--- a/assets/pptx/catalog-536.pptx
+++ b/assets/pptx/catalog-536.pptx
@@ -3942,7 +3942,7 @@
                 <a:ea typeface="Ebrima"/>
                 <a:cs typeface="Ebrima"/>
               </a:rPr>
-              <a:t>ብጣራም (2)</a:t>
+              <a:t>ብጣራም 2</a:t>
             </a:r>
           </a:p>
           <a:p>
@@ -3960,7 +3960,7 @@
                 <a:ea typeface="Ebrima"/>
                 <a:cs typeface="Ebrima"/>
               </a:rPr>
-              <a:t>ብጮህም (2)</a:t>
+              <a:t>ብጮህም 2</a:t>
             </a:r>
           </a:p>
           <a:p>
@@ -4439,7 +4439,7 @@
                 <a:ea typeface="Ebrima"/>
                 <a:cs typeface="Ebrima"/>
               </a:rPr>
-              <a:t>ብጣራም (2)</a:t>
+              <a:t>ብጣራም 2</a:t>
             </a:r>
           </a:p>
           <a:p>
@@ -4457,7 +4457,7 @@
                 <a:ea typeface="Ebrima"/>
                 <a:cs typeface="Ebrima"/>
               </a:rPr>
-              <a:t>ብጮህም (2)</a:t>
+              <a:t>ብጮህም 2</a:t>
             </a:r>
           </a:p>
           <a:p>
